--- a/fixtures/pptx/powerpoint/pitch-deck-new-slide.pptx
+++ b/fixtures/pptx/powerpoint/pitch-deck-new-slide.pptx
@@ -1882,10 +1882,4 @@
   <a:objectDefaults/>
   <a:extraClrSchemeLst/>
 </a:theme>
-</file>
-
-<file path=docMetadata/LabelInfo.xml><?xml version="1.0" encoding="utf-8"?>
-<clbl:labelList xmlns:clbl="http://schemas.microsoft.com/office/2020/mipLabelMetadata">
-  <clbl:label id="{a9ee03e0-b78c-4998-8bf4-79b266b85105}" enabled="1" method="Standard" siteId="{723a5a87-f39a-4a22-9247-3fc240c01396}" contentBits="0" removed="0"/>
-</clbl:labelList>
 </file>